--- a/decks/combined-bonding/combined-bonding_ch4_covalent-bonding.pptx
+++ b/decks/combined-bonding/combined-bonding_ch4_covalent-bonding.pptx
@@ -126,30 +126,30 @@
   <p:extLst>
     <p:ext uri="{521415D9-36F7-43E2-AB2F-B90AF26B5E84}">
       <p14:sectionLst xmlns:p14="http://schemas.microsoft.com/office/powerpoint/2010/main">
-        <p14:section name="Opening" id="{3f3a1bf7-090d-3b67-a193-95cf70963d9b}">
+        <p14:section name="Opening" id="{327d0265-393b-9237-d998-86587cd1c3b8}">
           <p14:sldIdLst>
             <p14:sldId id="256"/>
           </p14:sldIdLst>
         </p14:section>
-        <p14:section name="Gate" id="{ab4ecf8d-a654-00a6-ffae-9483b33df068}">
+        <p14:section name="Gate" id="{a7966ff7-609d-3e98-cbc5-bc35046fa3d7}">
           <p14:sldIdLst>
             <p14:sldId id="257"/>
             <p14:sldId id="258"/>
           </p14:sldIdLst>
         </p14:section>
-        <p14:section name="Pre-teach" id="{0fe5c9eb-cefb-2980-6aef-a639a0106f7d}">
+        <p14:section name="Pre-teach" id="{29c93c56-e860-b9d7-af61-b21be8b4dab5}">
           <p14:sldIdLst>
             <p14:sldId id="259"/>
             <p14:sldId id="260"/>
           </p14:sldIdLst>
         </p14:section>
-        <p14:section name="Read-along" id="{1fd26554-981d-a4be-13cd-1efffd054a64}">
+        <p14:section name="Read-along" id="{daf7d750-7010-e7a9-51ca-4e3283668534}">
           <p14:sldIdLst>
             <p14:sldId id="261"/>
             <p14:sldId id="262"/>
           </p14:sldIdLst>
         </p14:section>
-        <p14:section name="Teach" id="{97e03b0c-a8d2-66e6-c360-c1b9cd592938}">
+        <p14:section name="Teach" id="{c7eab67d-9c32-f8e9-5da1-80fb82da7f5c}">
           <p14:sldIdLst>
             <p14:sldId id="263"/>
             <p14:sldId id="264"/>
@@ -159,19 +159,19 @@
             <p14:sldId id="268"/>
           </p14:sldIdLst>
         </p14:section>
-        <p14:section name="Routes" id="{b6119e0e-35e7-4864-4e42-c529fc0dc39c}">
+        <p14:section name="Routes" id="{8696079d-ff57-47eb-31ed-fc189f1ad785}">
           <p14:sldIdLst>
             <p14:sldId id="269"/>
             <p14:sldId id="270"/>
             <p14:sldId id="271"/>
           </p14:sldIdLst>
         </p14:section>
-        <p14:section name="Close" id="{1edbdb79-9a1d-5db1-aa31-67e52197979e}">
+        <p14:section name="Close" id="{9668b3a4-9044-269b-6055-cf462c8aff4b}">
           <p14:sldIdLst>
             <p14:sldId id="272"/>
           </p14:sldIdLst>
         </p14:section>
-        <p14:section name="Answers" id="{41f6f4e5-e0f2-e1ed-a45a-6996cedc7776}">
+        <p14:section name="Answers" id="{80b15560-993f-f9e0-44a2-1302ce7f853b}">
           <p14:sldIdLst>
             <p14:sldId id="273"/>
             <p14:sldId id="274"/>
@@ -8163,7 +8163,7 @@
                 <a:ea typeface="Calibri" pitchFamily="34" charset="-122"/>
                 <a:cs typeface="Calibri" pitchFamily="34" charset="-120"/>
               </a:rPr>
-              <a:t>The molecules carry a charge that pushes them apart</a:t>
+              <a:t>Methane has a giant structure with very few bonds</a:t>
             </a:r>
             <a:endParaRPr lang="en-US" sz="2600" dirty="0"/>
           </a:p>
@@ -8200,7 +8200,7 @@
                 <a:ea typeface="Calibri" pitchFamily="34" charset="-122"/>
                 <a:cs typeface="Calibri" pitchFamily="34" charset="-120"/>
               </a:rPr>
-              <a:t>Methane has a giant structure with very few bonds</a:t>
+              <a:t>The molecules carry a charge that pushes them apart</a:t>
             </a:r>
             <a:endParaRPr lang="en-US" sz="2600" dirty="0"/>
           </a:p>
@@ -9567,7 +9567,7 @@
                 <a:ea typeface="Calibri" pitchFamily="34" charset="-122"/>
                 <a:cs typeface="Calibri" pitchFamily="34" charset="-120"/>
               </a:rPr>
-              <a:t>The transfer of an electron from one atom to another</a:t>
+              <a:t>The attraction between oppositely charged ions</a:t>
             </a:r>
             <a:endParaRPr lang="en-US" sz="2400" dirty="0"/>
           </a:p>
@@ -9604,7 +9604,7 @@
                 <a:ea typeface="Calibri" pitchFamily="34" charset="-122"/>
                 <a:cs typeface="Calibri" pitchFamily="34" charset="-120"/>
               </a:rPr>
-              <a:t>The attraction between oppositely charged ions</a:t>
+              <a:t>A weak force between two molecules</a:t>
             </a:r>
             <a:endParaRPr lang="en-US" sz="2400" dirty="0"/>
           </a:p>
@@ -9641,7 +9641,7 @@
                 <a:ea typeface="Calibri" pitchFamily="34" charset="-122"/>
                 <a:cs typeface="Calibri" pitchFamily="34" charset="-120"/>
               </a:rPr>
-              <a:t>A weak force between two molecules</a:t>
+              <a:t>The transfer of an electron from one atom to another</a:t>
             </a:r>
             <a:endParaRPr lang="en-US" sz="2400" dirty="0"/>
           </a:p>
@@ -11113,7 +11113,7 @@
                 <a:ea typeface="Calibri" pitchFamily="34" charset="-122"/>
                 <a:cs typeface="Calibri" pitchFamily="34" charset="-120"/>
               </a:rPr>
-              <a:t>The transfer of an electron from one atom to another</a:t>
+              <a:t>The attraction between oppositely charged ions</a:t>
             </a:r>
             <a:endParaRPr lang="en-US" sz="1800" dirty="0"/>
           </a:p>
@@ -11150,7 +11150,7 @@
                 <a:ea typeface="Calibri" pitchFamily="34" charset="-122"/>
                 <a:cs typeface="Calibri" pitchFamily="34" charset="-120"/>
               </a:rPr>
-              <a:t>The attraction between oppositely charged ions</a:t>
+              <a:t>A weak force between two molecules</a:t>
             </a:r>
             <a:endParaRPr lang="en-US" sz="1800" dirty="0"/>
           </a:p>
@@ -11187,7 +11187,7 @@
                 <a:ea typeface="Calibri" pitchFamily="34" charset="-122"/>
                 <a:cs typeface="Calibri" pitchFamily="34" charset="-120"/>
               </a:rPr>
-              <a:t>A weak force between two molecules</a:t>
+              <a:t>The transfer of an electron from one atom to another</a:t>
             </a:r>
             <a:endParaRPr lang="en-US" sz="1800" dirty="0"/>
           </a:p>

--- a/decks/combined-bonding/combined-bonding_ch4_covalent-bonding.pptx
+++ b/decks/combined-bonding/combined-bonding_ch4_covalent-bonding.pptx
@@ -126,30 +126,30 @@
   <p:extLst>
     <p:ext uri="{521415D9-36F7-43E2-AB2F-B90AF26B5E84}">
       <p14:sectionLst xmlns:p14="http://schemas.microsoft.com/office/powerpoint/2010/main">
-        <p14:section name="Opening" id="{327d0265-393b-9237-d998-86587cd1c3b8}">
+        <p14:section name="Opening" id="{5c8d9b40-f104-9efb-81a9-0fd1cbc8a984}">
           <p14:sldIdLst>
             <p14:sldId id="256"/>
           </p14:sldIdLst>
         </p14:section>
-        <p14:section name="Gate" id="{a7966ff7-609d-3e98-cbc5-bc35046fa3d7}">
+        <p14:section name="Gate" id="{f0627856-c3dc-c23b-26b3-ea7f6d8067be}">
           <p14:sldIdLst>
             <p14:sldId id="257"/>
             <p14:sldId id="258"/>
           </p14:sldIdLst>
         </p14:section>
-        <p14:section name="Pre-teach" id="{29c93c56-e860-b9d7-af61-b21be8b4dab5}">
+        <p14:section name="Pre-teach" id="{abff4a4c-2bbf-0b7a-2d7e-f25be5622750}">
           <p14:sldIdLst>
             <p14:sldId id="259"/>
             <p14:sldId id="260"/>
           </p14:sldIdLst>
         </p14:section>
-        <p14:section name="Read-along" id="{daf7d750-7010-e7a9-51ca-4e3283668534}">
+        <p14:section name="Read-along" id="{1a3e6caf-cd82-0ef8-d172-f4a68981d4fb}">
           <p14:sldIdLst>
             <p14:sldId id="261"/>
             <p14:sldId id="262"/>
           </p14:sldIdLst>
         </p14:section>
-        <p14:section name="Teach" id="{c7eab67d-9c32-f8e9-5da1-80fb82da7f5c}">
+        <p14:section name="Teach" id="{3b8b53e4-fe3f-20f5-b031-e6d1913485a3}">
           <p14:sldIdLst>
             <p14:sldId id="263"/>
             <p14:sldId id="264"/>
@@ -159,19 +159,19 @@
             <p14:sldId id="268"/>
           </p14:sldIdLst>
         </p14:section>
-        <p14:section name="Routes" id="{8696079d-ff57-47eb-31ed-fc189f1ad785}">
+        <p14:section name="Routes" id="{cdc0a913-a8fa-3f07-1093-976037f31bda}">
           <p14:sldIdLst>
             <p14:sldId id="269"/>
             <p14:sldId id="270"/>
             <p14:sldId id="271"/>
           </p14:sldIdLst>
         </p14:section>
-        <p14:section name="Close" id="{9668b3a4-9044-269b-6055-cf462c8aff4b}">
+        <p14:section name="Close" id="{91f6c7df-913e-0bf7-4f6f-7942f6e7e2e4}">
           <p14:sldIdLst>
             <p14:sldId id="272"/>
           </p14:sldIdLst>
         </p14:section>
-        <p14:section name="Answers" id="{80b15560-993f-f9e0-44a2-1302ce7f853b}">
+        <p14:section name="Answers" id="{5ccdf930-e915-8cd8-aa48-bd1084e53232}">
           <p14:sldIdLst>
             <p14:sldId id="273"/>
             <p14:sldId id="274"/>
